--- a/ゲーム科2年/00_前期/ゲームエンジンⅢ/バージョン管理/10_Branch.pptx
+++ b/ゲーム科2年/00_前期/ゲームエンジンⅢ/バージョン管理/10_Branch.pptx
@@ -266,7 +266,7 @@
           <a:p>
             <a:fld id="{E9CC885B-4903-4D54-9A93-00025F12DED9}" type="datetimeFigureOut">
               <a:rPr kumimoji="1" lang="ja-JP" altLang="en-US" smtClean="0"/>
-              <a:t>2025/1/16</a:t>
+              <a:t>2025/1/17</a:t>
             </a:fld>
             <a:endParaRPr kumimoji="1" lang="ja-JP" altLang="en-US"/>
           </a:p>
@@ -496,7 +496,7 @@
           <a:p>
             <a:fld id="{E9CC885B-4903-4D54-9A93-00025F12DED9}" type="datetimeFigureOut">
               <a:rPr kumimoji="1" lang="ja-JP" altLang="en-US" smtClean="0"/>
-              <a:t>2025/1/16</a:t>
+              <a:t>2025/1/17</a:t>
             </a:fld>
             <a:endParaRPr kumimoji="1" lang="ja-JP" altLang="en-US"/>
           </a:p>
@@ -736,7 +736,7 @@
           <a:p>
             <a:fld id="{E9CC885B-4903-4D54-9A93-00025F12DED9}" type="datetimeFigureOut">
               <a:rPr kumimoji="1" lang="ja-JP" altLang="en-US" smtClean="0"/>
-              <a:t>2025/1/16</a:t>
+              <a:t>2025/1/17</a:t>
             </a:fld>
             <a:endParaRPr kumimoji="1" lang="ja-JP" altLang="en-US"/>
           </a:p>
@@ -966,7 +966,7 @@
           <a:p>
             <a:fld id="{E9CC885B-4903-4D54-9A93-00025F12DED9}" type="datetimeFigureOut">
               <a:rPr kumimoji="1" lang="ja-JP" altLang="en-US" smtClean="0"/>
-              <a:t>2025/1/16</a:t>
+              <a:t>2025/1/17</a:t>
             </a:fld>
             <a:endParaRPr kumimoji="1" lang="ja-JP" altLang="en-US"/>
           </a:p>
@@ -1241,7 +1241,7 @@
           <a:p>
             <a:fld id="{E9CC885B-4903-4D54-9A93-00025F12DED9}" type="datetimeFigureOut">
               <a:rPr kumimoji="1" lang="ja-JP" altLang="en-US" smtClean="0"/>
-              <a:t>2025/1/16</a:t>
+              <a:t>2025/1/17</a:t>
             </a:fld>
             <a:endParaRPr kumimoji="1" lang="ja-JP" altLang="en-US"/>
           </a:p>
@@ -1570,7 +1570,7 @@
           <a:p>
             <a:fld id="{E9CC885B-4903-4D54-9A93-00025F12DED9}" type="datetimeFigureOut">
               <a:rPr kumimoji="1" lang="ja-JP" altLang="en-US" smtClean="0"/>
-              <a:t>2025/1/16</a:t>
+              <a:t>2025/1/17</a:t>
             </a:fld>
             <a:endParaRPr kumimoji="1" lang="ja-JP" altLang="en-US"/>
           </a:p>
@@ -2046,7 +2046,7 @@
           <a:p>
             <a:fld id="{E9CC885B-4903-4D54-9A93-00025F12DED9}" type="datetimeFigureOut">
               <a:rPr kumimoji="1" lang="ja-JP" altLang="en-US" smtClean="0"/>
-              <a:t>2025/1/16</a:t>
+              <a:t>2025/1/17</a:t>
             </a:fld>
             <a:endParaRPr kumimoji="1" lang="ja-JP" altLang="en-US"/>
           </a:p>
@@ -2187,7 +2187,7 @@
           <a:p>
             <a:fld id="{E9CC885B-4903-4D54-9A93-00025F12DED9}" type="datetimeFigureOut">
               <a:rPr kumimoji="1" lang="ja-JP" altLang="en-US" smtClean="0"/>
-              <a:t>2025/1/16</a:t>
+              <a:t>2025/1/17</a:t>
             </a:fld>
             <a:endParaRPr kumimoji="1" lang="ja-JP" altLang="en-US"/>
           </a:p>
@@ -2300,7 +2300,7 @@
           <a:p>
             <a:fld id="{E9CC885B-4903-4D54-9A93-00025F12DED9}" type="datetimeFigureOut">
               <a:rPr kumimoji="1" lang="ja-JP" altLang="en-US" smtClean="0"/>
-              <a:t>2025/1/16</a:t>
+              <a:t>2025/1/17</a:t>
             </a:fld>
             <a:endParaRPr kumimoji="1" lang="ja-JP" altLang="en-US"/>
           </a:p>
@@ -2643,7 +2643,7 @@
           <a:p>
             <a:fld id="{E9CC885B-4903-4D54-9A93-00025F12DED9}" type="datetimeFigureOut">
               <a:rPr kumimoji="1" lang="ja-JP" altLang="en-US" smtClean="0"/>
-              <a:t>2025/1/16</a:t>
+              <a:t>2025/1/17</a:t>
             </a:fld>
             <a:endParaRPr kumimoji="1" lang="ja-JP" altLang="en-US"/>
           </a:p>
@@ -2931,7 +2931,7 @@
           <a:p>
             <a:fld id="{E9CC885B-4903-4D54-9A93-00025F12DED9}" type="datetimeFigureOut">
               <a:rPr kumimoji="1" lang="ja-JP" altLang="en-US" smtClean="0"/>
-              <a:t>2025/1/16</a:t>
+              <a:t>2025/1/17</a:t>
             </a:fld>
             <a:endParaRPr kumimoji="1" lang="ja-JP" altLang="en-US"/>
           </a:p>
@@ -3204,7 +3204,7 @@
           <a:p>
             <a:fld id="{E9CC885B-4903-4D54-9A93-00025F12DED9}" type="datetimeFigureOut">
               <a:rPr kumimoji="1" lang="ja-JP" altLang="en-US" smtClean="0"/>
-              <a:t>2025/1/16</a:t>
+              <a:t>2025/1/17</a:t>
             </a:fld>
             <a:endParaRPr kumimoji="1" lang="ja-JP" altLang="en-US"/>
           </a:p>
@@ -4879,7 +4879,7 @@
           <a:p>
             <a:r>
               <a:rPr lang="ja-JP" altLang="en-US" sz="2400" dirty="0"/>
-              <a:t>ブランチを使って運用には以下のようなメリットがあります。</a:t>
+              <a:t>ブランチを使った運用には以下のようなメリットがあります。</a:t>
             </a:r>
             <a:endParaRPr lang="en-US" altLang="ja-JP" sz="2400" dirty="0"/>
           </a:p>
@@ -4915,7 +4915,7 @@
           <a:p>
             <a:r>
               <a:rPr lang="ja-JP" altLang="en-US" sz="2400" dirty="0"/>
-              <a:t>　・不具合の原因を調査しやすい</a:t>
+              <a:t>　・バックアップ代わりになる</a:t>
             </a:r>
             <a:endParaRPr lang="en-US" altLang="ja-JP" sz="2400" dirty="0"/>
           </a:p>
@@ -4940,7 +4940,7 @@
             </a:r>
             <a:r>
               <a:rPr lang="ja-JP" altLang="en-US" sz="2400" dirty="0"/>
-              <a:t>しなければ本体には実装されない</a:t>
+              <a:t>しなければ大元には実装されない</a:t>
             </a:r>
             <a:endParaRPr lang="en-US" altLang="ja-JP" sz="2400" dirty="0"/>
           </a:p>
@@ -4965,7 +4965,7 @@
             </a:r>
             <a:r>
               <a:rPr lang="ja-JP" altLang="en-US" sz="2400" dirty="0"/>
-              <a:t>しなければ本体には実装されない</a:t>
+              <a:t>しなければ大元には実装されない</a:t>
             </a:r>
             <a:endParaRPr lang="en-US" altLang="ja-JP" sz="2400" dirty="0"/>
           </a:p>
@@ -5089,7 +5089,7 @@
                   <a:srgbClr val="FF0000"/>
                 </a:solidFill>
               </a:rPr>
-              <a:t>リーダー以外の人が作業してください</a:t>
+              <a:t>誰かひとりが作業してください</a:t>
             </a:r>
             <a:endParaRPr lang="en-US" altLang="ja-JP" sz="2400" b="1" dirty="0">
               <a:solidFill>

--- a/ゲーム科2年/00_前期/ゲームエンジンⅢ/バージョン管理/10_Branch.pptx
+++ b/ゲーム科2年/00_前期/ゲームエンジンⅢ/バージョン管理/10_Branch.pptx
@@ -266,7 +266,7 @@
           <a:p>
             <a:fld id="{E9CC885B-4903-4D54-9A93-00025F12DED9}" type="datetimeFigureOut">
               <a:rPr kumimoji="1" lang="ja-JP" altLang="en-US" smtClean="0"/>
-              <a:t>2025/1/17</a:t>
+              <a:t>2025/1/27</a:t>
             </a:fld>
             <a:endParaRPr kumimoji="1" lang="ja-JP" altLang="en-US"/>
           </a:p>
@@ -496,7 +496,7 @@
           <a:p>
             <a:fld id="{E9CC885B-4903-4D54-9A93-00025F12DED9}" type="datetimeFigureOut">
               <a:rPr kumimoji="1" lang="ja-JP" altLang="en-US" smtClean="0"/>
-              <a:t>2025/1/17</a:t>
+              <a:t>2025/1/27</a:t>
             </a:fld>
             <a:endParaRPr kumimoji="1" lang="ja-JP" altLang="en-US"/>
           </a:p>
@@ -736,7 +736,7 @@
           <a:p>
             <a:fld id="{E9CC885B-4903-4D54-9A93-00025F12DED9}" type="datetimeFigureOut">
               <a:rPr kumimoji="1" lang="ja-JP" altLang="en-US" smtClean="0"/>
-              <a:t>2025/1/17</a:t>
+              <a:t>2025/1/27</a:t>
             </a:fld>
             <a:endParaRPr kumimoji="1" lang="ja-JP" altLang="en-US"/>
           </a:p>
@@ -966,7 +966,7 @@
           <a:p>
             <a:fld id="{E9CC885B-4903-4D54-9A93-00025F12DED9}" type="datetimeFigureOut">
               <a:rPr kumimoji="1" lang="ja-JP" altLang="en-US" smtClean="0"/>
-              <a:t>2025/1/17</a:t>
+              <a:t>2025/1/27</a:t>
             </a:fld>
             <a:endParaRPr kumimoji="1" lang="ja-JP" altLang="en-US"/>
           </a:p>
@@ -1241,7 +1241,7 @@
           <a:p>
             <a:fld id="{E9CC885B-4903-4D54-9A93-00025F12DED9}" type="datetimeFigureOut">
               <a:rPr kumimoji="1" lang="ja-JP" altLang="en-US" smtClean="0"/>
-              <a:t>2025/1/17</a:t>
+              <a:t>2025/1/27</a:t>
             </a:fld>
             <a:endParaRPr kumimoji="1" lang="ja-JP" altLang="en-US"/>
           </a:p>
@@ -1570,7 +1570,7 @@
           <a:p>
             <a:fld id="{E9CC885B-4903-4D54-9A93-00025F12DED9}" type="datetimeFigureOut">
               <a:rPr kumimoji="1" lang="ja-JP" altLang="en-US" smtClean="0"/>
-              <a:t>2025/1/17</a:t>
+              <a:t>2025/1/27</a:t>
             </a:fld>
             <a:endParaRPr kumimoji="1" lang="ja-JP" altLang="en-US"/>
           </a:p>
@@ -2046,7 +2046,7 @@
           <a:p>
             <a:fld id="{E9CC885B-4903-4D54-9A93-00025F12DED9}" type="datetimeFigureOut">
               <a:rPr kumimoji="1" lang="ja-JP" altLang="en-US" smtClean="0"/>
-              <a:t>2025/1/17</a:t>
+              <a:t>2025/1/27</a:t>
             </a:fld>
             <a:endParaRPr kumimoji="1" lang="ja-JP" altLang="en-US"/>
           </a:p>
@@ -2187,7 +2187,7 @@
           <a:p>
             <a:fld id="{E9CC885B-4903-4D54-9A93-00025F12DED9}" type="datetimeFigureOut">
               <a:rPr kumimoji="1" lang="ja-JP" altLang="en-US" smtClean="0"/>
-              <a:t>2025/1/17</a:t>
+              <a:t>2025/1/27</a:t>
             </a:fld>
             <a:endParaRPr kumimoji="1" lang="ja-JP" altLang="en-US"/>
           </a:p>
@@ -2300,7 +2300,7 @@
           <a:p>
             <a:fld id="{E9CC885B-4903-4D54-9A93-00025F12DED9}" type="datetimeFigureOut">
               <a:rPr kumimoji="1" lang="ja-JP" altLang="en-US" smtClean="0"/>
-              <a:t>2025/1/17</a:t>
+              <a:t>2025/1/27</a:t>
             </a:fld>
             <a:endParaRPr kumimoji="1" lang="ja-JP" altLang="en-US"/>
           </a:p>
@@ -2643,7 +2643,7 @@
           <a:p>
             <a:fld id="{E9CC885B-4903-4D54-9A93-00025F12DED9}" type="datetimeFigureOut">
               <a:rPr kumimoji="1" lang="ja-JP" altLang="en-US" smtClean="0"/>
-              <a:t>2025/1/17</a:t>
+              <a:t>2025/1/27</a:t>
             </a:fld>
             <a:endParaRPr kumimoji="1" lang="ja-JP" altLang="en-US"/>
           </a:p>
@@ -2931,7 +2931,7 @@
           <a:p>
             <a:fld id="{E9CC885B-4903-4D54-9A93-00025F12DED9}" type="datetimeFigureOut">
               <a:rPr kumimoji="1" lang="ja-JP" altLang="en-US" smtClean="0"/>
-              <a:t>2025/1/17</a:t>
+              <a:t>2025/1/27</a:t>
             </a:fld>
             <a:endParaRPr kumimoji="1" lang="ja-JP" altLang="en-US"/>
           </a:p>
@@ -3204,7 +3204,7 @@
           <a:p>
             <a:fld id="{E9CC885B-4903-4D54-9A93-00025F12DED9}" type="datetimeFigureOut">
               <a:rPr kumimoji="1" lang="ja-JP" altLang="en-US" smtClean="0"/>
-              <a:t>2025/1/17</a:t>
+              <a:t>2025/1/27</a:t>
             </a:fld>
             <a:endParaRPr kumimoji="1" lang="ja-JP" altLang="en-US"/>
           </a:p>
@@ -3835,7 +3835,11 @@
           <a:lstStyle/>
           <a:p>
             <a:r>
-              <a:rPr lang="en-US" altLang="ja-JP" sz="2400" dirty="0"/>
+              <a:rPr lang="en-US" altLang="ja-JP" sz="2400" b="1" dirty="0">
+                <a:solidFill>
+                  <a:srgbClr val="0070C0"/>
+                </a:solidFill>
+              </a:rPr>
               <a:t>Branch</a:t>
             </a:r>
             <a:r>
@@ -4220,7 +4224,19 @@
           <a:p>
             <a:r>
               <a:rPr lang="ja-JP" altLang="en-US" sz="2400" dirty="0"/>
-              <a:t>これにより、タスクごとに部分分けした作業が可能になります。</a:t>
+              <a:t>これにより、タスクごとに</a:t>
+            </a:r>
+            <a:r>
+              <a:rPr lang="ja-JP" altLang="en-US" sz="2400" b="1" dirty="0">
+                <a:solidFill>
+                  <a:srgbClr val="FF0000"/>
+                </a:solidFill>
+              </a:rPr>
+              <a:t>部分分けした作業</a:t>
+            </a:r>
+            <a:r>
+              <a:rPr lang="ja-JP" altLang="en-US" sz="2400" dirty="0"/>
+              <a:t>が可能になります。</a:t>
             </a:r>
             <a:endParaRPr lang="en-US" altLang="ja-JP" sz="2400" dirty="0"/>
           </a:p>
@@ -5711,7 +5727,7 @@
         <p:spPr>
           <a:xfrm>
             <a:off x="567542" y="1216429"/>
-            <a:ext cx="9911688" cy="830997"/>
+            <a:ext cx="10014280" cy="830997"/>
           </a:xfrm>
           <a:prstGeom prst="rect">
             <a:avLst/>
@@ -5725,7 +5741,11 @@
           <a:lstStyle/>
           <a:p>
             <a:r>
-              <a:rPr lang="en-US" altLang="ja-JP" sz="2400" dirty="0"/>
+              <a:rPr lang="en-US" altLang="ja-JP" sz="2400" b="1" dirty="0">
+                <a:solidFill>
+                  <a:srgbClr val="0070C0"/>
+                </a:solidFill>
+              </a:rPr>
               <a:t>Push</a:t>
             </a:r>
             <a:r>
@@ -5733,7 +5753,11 @@
               <a:t>することにより</a:t>
             </a:r>
             <a:r>
-              <a:rPr lang="en-US" altLang="ja-JP" sz="2400" dirty="0"/>
+              <a:rPr lang="en-US" altLang="ja-JP" sz="2400" b="1" dirty="0">
+                <a:solidFill>
+                  <a:srgbClr val="0070C0"/>
+                </a:solidFill>
+              </a:rPr>
               <a:t>Branch</a:t>
             </a:r>
             <a:r>
@@ -5744,7 +5768,11 @@
           </a:p>
           <a:p>
             <a:r>
-              <a:rPr lang="en-US" altLang="ja-JP" sz="2400" dirty="0"/>
+              <a:rPr lang="en-US" altLang="ja-JP" sz="2400" b="1" dirty="0">
+                <a:solidFill>
+                  <a:srgbClr val="0070C0"/>
+                </a:solidFill>
+              </a:rPr>
               <a:t>Push</a:t>
             </a:r>
             <a:r>

--- a/ゲーム科2年/00_前期/ゲームエンジンⅢ/バージョン管理/10_Branch.pptx
+++ b/ゲーム科2年/00_前期/ゲームエンジンⅢ/バージョン管理/10_Branch.pptx
@@ -266,7 +266,7 @@
           <a:p>
             <a:fld id="{E9CC885B-4903-4D54-9A93-00025F12DED9}" type="datetimeFigureOut">
               <a:rPr kumimoji="1" lang="ja-JP" altLang="en-US" smtClean="0"/>
-              <a:t>2025/1/27</a:t>
+              <a:t>2025/1/17</a:t>
             </a:fld>
             <a:endParaRPr kumimoji="1" lang="ja-JP" altLang="en-US"/>
           </a:p>
@@ -496,7 +496,7 @@
           <a:p>
             <a:fld id="{E9CC885B-4903-4D54-9A93-00025F12DED9}" type="datetimeFigureOut">
               <a:rPr kumimoji="1" lang="ja-JP" altLang="en-US" smtClean="0"/>
-              <a:t>2025/1/27</a:t>
+              <a:t>2025/1/17</a:t>
             </a:fld>
             <a:endParaRPr kumimoji="1" lang="ja-JP" altLang="en-US"/>
           </a:p>
@@ -736,7 +736,7 @@
           <a:p>
             <a:fld id="{E9CC885B-4903-4D54-9A93-00025F12DED9}" type="datetimeFigureOut">
               <a:rPr kumimoji="1" lang="ja-JP" altLang="en-US" smtClean="0"/>
-              <a:t>2025/1/27</a:t>
+              <a:t>2025/1/17</a:t>
             </a:fld>
             <a:endParaRPr kumimoji="1" lang="ja-JP" altLang="en-US"/>
           </a:p>
@@ -966,7 +966,7 @@
           <a:p>
             <a:fld id="{E9CC885B-4903-4D54-9A93-00025F12DED9}" type="datetimeFigureOut">
               <a:rPr kumimoji="1" lang="ja-JP" altLang="en-US" smtClean="0"/>
-              <a:t>2025/1/27</a:t>
+              <a:t>2025/1/17</a:t>
             </a:fld>
             <a:endParaRPr kumimoji="1" lang="ja-JP" altLang="en-US"/>
           </a:p>
@@ -1241,7 +1241,7 @@
           <a:p>
             <a:fld id="{E9CC885B-4903-4D54-9A93-00025F12DED9}" type="datetimeFigureOut">
               <a:rPr kumimoji="1" lang="ja-JP" altLang="en-US" smtClean="0"/>
-              <a:t>2025/1/27</a:t>
+              <a:t>2025/1/17</a:t>
             </a:fld>
             <a:endParaRPr kumimoji="1" lang="ja-JP" altLang="en-US"/>
           </a:p>
@@ -1570,7 +1570,7 @@
           <a:p>
             <a:fld id="{E9CC885B-4903-4D54-9A93-00025F12DED9}" type="datetimeFigureOut">
               <a:rPr kumimoji="1" lang="ja-JP" altLang="en-US" smtClean="0"/>
-              <a:t>2025/1/27</a:t>
+              <a:t>2025/1/17</a:t>
             </a:fld>
             <a:endParaRPr kumimoji="1" lang="ja-JP" altLang="en-US"/>
           </a:p>
@@ -2046,7 +2046,7 @@
           <a:p>
             <a:fld id="{E9CC885B-4903-4D54-9A93-00025F12DED9}" type="datetimeFigureOut">
               <a:rPr kumimoji="1" lang="ja-JP" altLang="en-US" smtClean="0"/>
-              <a:t>2025/1/27</a:t>
+              <a:t>2025/1/17</a:t>
             </a:fld>
             <a:endParaRPr kumimoji="1" lang="ja-JP" altLang="en-US"/>
           </a:p>
@@ -2187,7 +2187,7 @@
           <a:p>
             <a:fld id="{E9CC885B-4903-4D54-9A93-00025F12DED9}" type="datetimeFigureOut">
               <a:rPr kumimoji="1" lang="ja-JP" altLang="en-US" smtClean="0"/>
-              <a:t>2025/1/27</a:t>
+              <a:t>2025/1/17</a:t>
             </a:fld>
             <a:endParaRPr kumimoji="1" lang="ja-JP" altLang="en-US"/>
           </a:p>
@@ -2300,7 +2300,7 @@
           <a:p>
             <a:fld id="{E9CC885B-4903-4D54-9A93-00025F12DED9}" type="datetimeFigureOut">
               <a:rPr kumimoji="1" lang="ja-JP" altLang="en-US" smtClean="0"/>
-              <a:t>2025/1/27</a:t>
+              <a:t>2025/1/17</a:t>
             </a:fld>
             <a:endParaRPr kumimoji="1" lang="ja-JP" altLang="en-US"/>
           </a:p>
@@ -2643,7 +2643,7 @@
           <a:p>
             <a:fld id="{E9CC885B-4903-4D54-9A93-00025F12DED9}" type="datetimeFigureOut">
               <a:rPr kumimoji="1" lang="ja-JP" altLang="en-US" smtClean="0"/>
-              <a:t>2025/1/27</a:t>
+              <a:t>2025/1/17</a:t>
             </a:fld>
             <a:endParaRPr kumimoji="1" lang="ja-JP" altLang="en-US"/>
           </a:p>
@@ -2931,7 +2931,7 @@
           <a:p>
             <a:fld id="{E9CC885B-4903-4D54-9A93-00025F12DED9}" type="datetimeFigureOut">
               <a:rPr kumimoji="1" lang="ja-JP" altLang="en-US" smtClean="0"/>
-              <a:t>2025/1/27</a:t>
+              <a:t>2025/1/17</a:t>
             </a:fld>
             <a:endParaRPr kumimoji="1" lang="ja-JP" altLang="en-US"/>
           </a:p>
@@ -3204,7 +3204,7 @@
           <a:p>
             <a:fld id="{E9CC885B-4903-4D54-9A93-00025F12DED9}" type="datetimeFigureOut">
               <a:rPr kumimoji="1" lang="ja-JP" altLang="en-US" smtClean="0"/>
-              <a:t>2025/1/27</a:t>
+              <a:t>2025/1/17</a:t>
             </a:fld>
             <a:endParaRPr kumimoji="1" lang="ja-JP" altLang="en-US"/>
           </a:p>
@@ -3835,11 +3835,7 @@
           <a:lstStyle/>
           <a:p>
             <a:r>
-              <a:rPr lang="en-US" altLang="ja-JP" sz="2400" b="1" dirty="0">
-                <a:solidFill>
-                  <a:srgbClr val="0070C0"/>
-                </a:solidFill>
-              </a:rPr>
+              <a:rPr lang="en-US" altLang="ja-JP" sz="2400" dirty="0"/>
               <a:t>Branch</a:t>
             </a:r>
             <a:r>
@@ -4224,19 +4220,7 @@
           <a:p>
             <a:r>
               <a:rPr lang="ja-JP" altLang="en-US" sz="2400" dirty="0"/>
-              <a:t>これにより、タスクごとに</a:t>
-            </a:r>
-            <a:r>
-              <a:rPr lang="ja-JP" altLang="en-US" sz="2400" b="1" dirty="0">
-                <a:solidFill>
-                  <a:srgbClr val="FF0000"/>
-                </a:solidFill>
-              </a:rPr>
-              <a:t>部分分けした作業</a:t>
-            </a:r>
-            <a:r>
-              <a:rPr lang="ja-JP" altLang="en-US" sz="2400" dirty="0"/>
-              <a:t>が可能になります。</a:t>
+              <a:t>これにより、タスクごとに部分分けした作業が可能になります。</a:t>
             </a:r>
             <a:endParaRPr lang="en-US" altLang="ja-JP" sz="2400" dirty="0"/>
           </a:p>
@@ -5727,7 +5711,7 @@
         <p:spPr>
           <a:xfrm>
             <a:off x="567542" y="1216429"/>
-            <a:ext cx="10014280" cy="830997"/>
+            <a:ext cx="9911688" cy="830997"/>
           </a:xfrm>
           <a:prstGeom prst="rect">
             <a:avLst/>
@@ -5741,11 +5725,7 @@
           <a:lstStyle/>
           <a:p>
             <a:r>
-              <a:rPr lang="en-US" altLang="ja-JP" sz="2400" b="1" dirty="0">
-                <a:solidFill>
-                  <a:srgbClr val="0070C0"/>
-                </a:solidFill>
-              </a:rPr>
+              <a:rPr lang="en-US" altLang="ja-JP" sz="2400" dirty="0"/>
               <a:t>Push</a:t>
             </a:r>
             <a:r>
@@ -5753,11 +5733,7 @@
               <a:t>することにより</a:t>
             </a:r>
             <a:r>
-              <a:rPr lang="en-US" altLang="ja-JP" sz="2400" b="1" dirty="0">
-                <a:solidFill>
-                  <a:srgbClr val="0070C0"/>
-                </a:solidFill>
-              </a:rPr>
+              <a:rPr lang="en-US" altLang="ja-JP" sz="2400" dirty="0"/>
               <a:t>Branch</a:t>
             </a:r>
             <a:r>
@@ -5768,11 +5744,7 @@
           </a:p>
           <a:p>
             <a:r>
-              <a:rPr lang="en-US" altLang="ja-JP" sz="2400" b="1" dirty="0">
-                <a:solidFill>
-                  <a:srgbClr val="0070C0"/>
-                </a:solidFill>
-              </a:rPr>
+              <a:rPr lang="en-US" altLang="ja-JP" sz="2400" dirty="0"/>
               <a:t>Push</a:t>
             </a:r>
             <a:r>
